--- a/LINEオープンキャンペーン_26年10-12月_ご案内.pptx
+++ b/LINEオープンキャンペーン_26年10-12月_ご案内.pptx
@@ -8,8 +8,6 @@
     <p:notesMasterId r:id="rId5"/>
   </p:notesMasterIdLst>
   <p:sldIdLst>
-    <p:sldId id="256" r:id="rId6"/>
-    <p:sldId id="257" r:id="rId7"/>
     <p:sldId id="258" r:id="rId8"/>
     <p:sldId id="259" r:id="rId14"/>
     <p:sldId id="260" r:id="rId15"/>
@@ -1428,345 +1426,6 @@
     </a:lvl9pPr>
   </p:notesStyle>
 </p:notesMaster>
-</file>
-
-<file path=ppt/notesSlides/notesSlide1.xml><?xml version="1.0" encoding="utf-8"?>
-<p:notes xmlns:a="http://schemas.openxmlformats.org/drawingml/2006/main" xmlns:r="http://schemas.openxmlformats.org/officeDocument/2006/relationships" xmlns:mc="http://schemas.openxmlformats.org/markup-compatibility/2006" xmlns:mv="urn:schemas-microsoft-com:mac:vml" xmlns:p="http://schemas.openxmlformats.org/presentationml/2006/main" xmlns:c="http://schemas.openxmlformats.org/drawingml/2006/chart" xmlns:dgm="http://schemas.openxmlformats.org/drawingml/2006/diagram" xmlns:o="urn:schemas-microsoft-com:office:office" xmlns:v="urn:schemas-microsoft-com:vml" xmlns:pvml="urn:schemas-microsoft-com:office:powerpoint" xmlns:com="http://schemas.openxmlformats.org/drawingml/2006/compatibility" xmlns:p14="http://schemas.microsoft.com/office/powerpoint/2010/main" xmlns:p15="http://schemas.microsoft.com/office/powerpoint/2012/main" xmlns:ahyp="http://schemas.microsoft.com/office/drawing/2018/hyperlinkcolor" showMasterPhAnim="0" showMasterSp="0">
-  <p:cSld>
-    <p:spTree>
-      <p:nvGrpSpPr>
-        <p:cNvPr id="20" name="Shape 20"/>
-        <p:cNvGrpSpPr/>
-        <p:nvPr/>
-      </p:nvGrpSpPr>
-      <p:grpSpPr>
-        <a:xfrm>
-          <a:off x="0" y="0"/>
-          <a:ext cx="0" cy="0"/>
-          <a:chOff x="0" y="0"/>
-          <a:chExt cx="0" cy="0"/>
-        </a:xfrm>
-      </p:grpSpPr>
-      <p:sp>
-        <p:nvSpPr>
-          <p:cNvPr id="21" name="Google Shape;21;p1:notes"/>
-          <p:cNvSpPr/>
-          <p:nvPr>
-            <p:ph idx="2" type="sldImg"/>
-          </p:nvPr>
-        </p:nvSpPr>
-        <p:spPr>
-          <a:xfrm>
-            <a:off x="3124200" y="509588"/>
-            <a:ext cx="3681413" cy="2549525"/>
-          </a:xfrm>
-          <a:custGeom>
-            <a:rect b="b" l="l" r="r" t="t"/>
-            <a:pathLst>
-              <a:path extrusionOk="0" h="120000" w="120000">
-                <a:moveTo>
-                  <a:pt x="0" y="0"/>
-                </a:moveTo>
-                <a:lnTo>
-                  <a:pt x="120000" y="0"/>
-                </a:lnTo>
-                <a:lnTo>
-                  <a:pt x="120000" y="120000"/>
-                </a:lnTo>
-                <a:lnTo>
-                  <a:pt x="0" y="120000"/>
-                </a:lnTo>
-                <a:close/>
-              </a:path>
-            </a:pathLst>
-          </a:custGeom>
-          <a:noFill/>
-          <a:ln cap="flat" cmpd="sng" w="9525">
-            <a:solidFill>
-              <a:srgbClr val="000000"/>
-            </a:solidFill>
-            <a:prstDash val="solid"/>
-            <a:miter lim="8000"/>
-            <a:headEnd len="sm" w="sm" type="none"/>
-            <a:tailEnd len="sm" w="sm" type="none"/>
-          </a:ln>
-        </p:spPr>
-      </p:sp>
-      <p:sp>
-        <p:nvSpPr>
-          <p:cNvPr id="22" name="Google Shape;22;p1:notes"/>
-          <p:cNvSpPr txBox="1"/>
-          <p:nvPr>
-            <p:ph idx="1" type="body"/>
-          </p:nvPr>
-        </p:nvSpPr>
-        <p:spPr>
-          <a:xfrm>
-            <a:off x="680686" y="4716161"/>
-            <a:ext cx="5439410" cy="4468185"/>
-          </a:xfrm>
-          <a:prstGeom prst="rect">
-            <a:avLst/>
-          </a:prstGeom>
-          <a:noFill/>
-          <a:ln>
-            <a:noFill/>
-          </a:ln>
-        </p:spPr>
-        <p:txBody>
-          <a:bodyPr anchorCtr="0" anchor="t" bIns="44100" lIns="88200" spcFirstLastPara="1" rIns="88200" wrap="square" tIns="44100">
-            <a:noAutofit/>
-          </a:bodyPr>
-          <a:lstStyle/>
-          <a:p>
-            <a:pPr indent="0" lvl="0" marL="0" rtl="0" algn="l">
-              <a:spcBef>
-                <a:spcPts val="0"/>
-              </a:spcBef>
-              <a:spcAft>
-                <a:spcPts val="0"/>
-              </a:spcAft>
-              <a:buNone/>
-            </a:pPr>
-            <a:r>
-              <a:t/>
-            </a:r>
-            <a:endParaRPr>
-              <a:latin typeface="Calibri"/>
-              <a:ea typeface="Calibri"/>
-              <a:cs typeface="Calibri"/>
-              <a:sym typeface="Calibri"/>
-            </a:endParaRPr>
-          </a:p>
-        </p:txBody>
-      </p:sp>
-      <p:sp>
-        <p:nvSpPr>
-          <p:cNvPr id="23" name="Google Shape;23;p1:notes"/>
-          <p:cNvSpPr txBox="1"/>
-          <p:nvPr>
-            <p:ph idx="11" type="ftr"/>
-          </p:nvPr>
-        </p:nvSpPr>
-        <p:spPr>
-          <a:xfrm>
-            <a:off x="1" y="9432321"/>
-            <a:ext cx="2946094" cy="495952"/>
-          </a:xfrm>
-          <a:prstGeom prst="rect">
-            <a:avLst/>
-          </a:prstGeom>
-          <a:noFill/>
-          <a:ln>
-            <a:noFill/>
-          </a:ln>
-        </p:spPr>
-        <p:txBody>
-          <a:bodyPr anchorCtr="0" anchor="b" bIns="44100" lIns="88200" spcFirstLastPara="1" rIns="88200" wrap="square" tIns="44100">
-            <a:noAutofit/>
-          </a:bodyPr>
-          <a:lstStyle/>
-          <a:p>
-            <a:pPr indent="0" lvl="0" marL="0" rtl="0" algn="l">
-              <a:spcBef>
-                <a:spcPts val="0"/>
-              </a:spcBef>
-              <a:spcAft>
-                <a:spcPts val="0"/>
-              </a:spcAft>
-              <a:buNone/>
-            </a:pPr>
-            <a:r>
-              <a:t/>
-            </a:r>
-            <a:endParaRPr/>
-          </a:p>
-        </p:txBody>
-      </p:sp>
-      <p:sp>
-        <p:nvSpPr>
-          <p:cNvPr id="24" name="Google Shape;24;p1:notes"/>
-          <p:cNvSpPr txBox="1"/>
-          <p:nvPr>
-            <p:ph idx="12" type="sldNum"/>
-          </p:nvPr>
-        </p:nvSpPr>
-        <p:spPr>
-          <a:xfrm>
-            <a:off x="3851650" y="9432321"/>
-            <a:ext cx="2946093" cy="495952"/>
-          </a:xfrm>
-          <a:prstGeom prst="rect">
-            <a:avLst/>
-          </a:prstGeom>
-          <a:noFill/>
-          <a:ln>
-            <a:noFill/>
-          </a:ln>
-        </p:spPr>
-        <p:txBody>
-          <a:bodyPr anchorCtr="0" anchor="b" bIns="44100" lIns="88200" spcFirstLastPara="1" rIns="88200" wrap="square" tIns="44100">
-            <a:noAutofit/>
-          </a:bodyPr>
-          <a:lstStyle/>
-          <a:p>
-            <a:pPr indent="0" lvl="0" marL="0" rtl="0" algn="r">
-              <a:spcBef>
-                <a:spcPts val="0"/>
-              </a:spcBef>
-              <a:spcAft>
-                <a:spcPts val="0"/>
-              </a:spcAft>
-              <a:buNone/>
-            </a:pPr>
-            <a:fld id="{00000000-1234-1234-1234-123412341234}" type="slidenum">
-              <a:rPr b="0" i="0" lang="ja-JP" sz="1300" u="none" cap="none" strike="noStrike">
-                <a:solidFill>
-                  <a:schemeClr val="dk1"/>
-                </a:solidFill>
-                <a:latin typeface="Calibri"/>
-                <a:ea typeface="Calibri"/>
-                <a:cs typeface="Calibri"/>
-                <a:sym typeface="Calibri"/>
-              </a:rPr>
-              <a:t>‹#›</a:t>
-            </a:fld>
-            <a:endParaRPr b="0" i="0" sz="1300" u="none" cap="none" strike="noStrike">
-              <a:solidFill>
-                <a:schemeClr val="dk1"/>
-              </a:solidFill>
-              <a:latin typeface="Calibri"/>
-              <a:ea typeface="Calibri"/>
-              <a:cs typeface="Calibri"/>
-              <a:sym typeface="Calibri"/>
-            </a:endParaRPr>
-          </a:p>
-        </p:txBody>
-      </p:sp>
-    </p:spTree>
-  </p:cSld>
-  <p:clrMapOvr>
-    <a:masterClrMapping/>
-  </p:clrMapOvr>
-</p:notes>
-</file>
-
-<file path=ppt/notesSlides/notesSlide2.xml><?xml version="1.0" encoding="utf-8"?>
-<p:notes xmlns:a="http://schemas.openxmlformats.org/drawingml/2006/main" xmlns:r="http://schemas.openxmlformats.org/officeDocument/2006/relationships" xmlns:mc="http://schemas.openxmlformats.org/markup-compatibility/2006" xmlns:mv="urn:schemas-microsoft-com:mac:vml" xmlns:p="http://schemas.openxmlformats.org/presentationml/2006/main" xmlns:c="http://schemas.openxmlformats.org/drawingml/2006/chart" xmlns:dgm="http://schemas.openxmlformats.org/drawingml/2006/diagram" xmlns:o="urn:schemas-microsoft-com:office:office" xmlns:v="urn:schemas-microsoft-com:vml" xmlns:pvml="urn:schemas-microsoft-com:office:powerpoint" xmlns:com="http://schemas.openxmlformats.org/drawingml/2006/compatibility" xmlns:p14="http://schemas.microsoft.com/office/powerpoint/2010/main" xmlns:p15="http://schemas.microsoft.com/office/powerpoint/2012/main" xmlns:ahyp="http://schemas.microsoft.com/office/drawing/2018/hyperlinkcolor" showMasterPhAnim="0" showMasterSp="0">
-  <p:cSld>
-    <p:spTree>
-      <p:nvGrpSpPr>
-        <p:cNvPr id="30" name="Shape 30"/>
-        <p:cNvGrpSpPr/>
-        <p:nvPr/>
-      </p:nvGrpSpPr>
-      <p:grpSpPr>
-        <a:xfrm>
-          <a:off x="0" y="0"/>
-          <a:ext cx="0" cy="0"/>
-          <a:chOff x="0" y="0"/>
-          <a:chExt cx="0" cy="0"/>
-        </a:xfrm>
-      </p:grpSpPr>
-      <p:sp>
-        <p:nvSpPr>
-          <p:cNvPr id="31" name="Google Shape;31;p2:notes"/>
-          <p:cNvSpPr txBox="1"/>
-          <p:nvPr>
-            <p:ph idx="1" type="body"/>
-          </p:nvPr>
-        </p:nvSpPr>
-        <p:spPr>
-          <a:xfrm>
-            <a:off x="680720" y="4783307"/>
-            <a:ext cx="5445760" cy="3913614"/>
-          </a:xfrm>
-          <a:prstGeom prst="rect">
-            <a:avLst/>
-          </a:prstGeom>
-          <a:noFill/>
-          <a:ln>
-            <a:noFill/>
-          </a:ln>
-        </p:spPr>
-        <p:txBody>
-          <a:bodyPr anchorCtr="0" anchor="t" bIns="45700" lIns="91425" spcFirstLastPara="1" rIns="91425" wrap="square" tIns="45700">
-            <a:noAutofit/>
-          </a:bodyPr>
-          <a:lstStyle/>
-          <a:p>
-            <a:pPr indent="0" lvl="0" marL="0" rtl="0" algn="l">
-              <a:spcBef>
-                <a:spcPts val="0"/>
-              </a:spcBef>
-              <a:spcAft>
-                <a:spcPts val="0"/>
-              </a:spcAft>
-              <a:buClr>
-                <a:schemeClr val="dk1"/>
-              </a:buClr>
-              <a:buSzPts val="1200"/>
-              <a:buFont typeface="Calibri"/>
-              <a:buNone/>
-            </a:pPr>
-            <a:r>
-              <a:t/>
-            </a:r>
-            <a:endParaRPr/>
-          </a:p>
-        </p:txBody>
-      </p:sp>
-      <p:sp>
-        <p:nvSpPr>
-          <p:cNvPr id="32" name="Google Shape;32;p2:notes"/>
-          <p:cNvSpPr/>
-          <p:nvPr>
-            <p:ph idx="2" type="sldImg"/>
-          </p:nvPr>
-        </p:nvSpPr>
-        <p:spPr>
-          <a:xfrm>
-            <a:off x="981075" y="1243013"/>
-            <a:ext cx="4845050" cy="3354387"/>
-          </a:xfrm>
-          <a:custGeom>
-            <a:rect b="b" l="l" r="r" t="t"/>
-            <a:pathLst>
-              <a:path extrusionOk="0" h="120000" w="120000">
-                <a:moveTo>
-                  <a:pt x="0" y="0"/>
-                </a:moveTo>
-                <a:lnTo>
-                  <a:pt x="120000" y="0"/>
-                </a:lnTo>
-                <a:lnTo>
-                  <a:pt x="120000" y="120000"/>
-                </a:lnTo>
-                <a:lnTo>
-                  <a:pt x="0" y="120000"/>
-                </a:lnTo>
-                <a:close/>
-              </a:path>
-            </a:pathLst>
-          </a:custGeom>
-          <a:noFill/>
-          <a:ln cap="flat" cmpd="sng" w="12700">
-            <a:solidFill>
-              <a:srgbClr val="000000"/>
-            </a:solidFill>
-            <a:prstDash val="solid"/>
-            <a:round/>
-            <a:headEnd len="sm" w="sm" type="none"/>
-            <a:tailEnd len="sm" w="sm" type="none"/>
-          </a:ln>
-        </p:spPr>
-      </p:sp>
-    </p:spTree>
-  </p:cSld>
-  <p:clrMapOvr>
-    <a:masterClrMapping/>
-  </p:clrMapOvr>
-</p:notes>
 </file>
 
 <file path=ppt/notesSlides/notesSlide3.xml><?xml version="1.0" encoding="utf-8"?>
@@ -2987,430 +2646,6 @@
 </p:sldMaster>
 </file>
 
-<file path=ppt/slides/slide1.xml><?xml version="1.0" encoding="utf-8"?>
-<p:sld xmlns:a="http://schemas.openxmlformats.org/drawingml/2006/main" xmlns:r="http://schemas.openxmlformats.org/officeDocument/2006/relationships" xmlns:mc="http://schemas.openxmlformats.org/markup-compatibility/2006" xmlns:mv="urn:schemas-microsoft-com:mac:vml" xmlns:p="http://schemas.openxmlformats.org/presentationml/2006/main" xmlns:c="http://schemas.openxmlformats.org/drawingml/2006/chart" xmlns:dgm="http://schemas.openxmlformats.org/drawingml/2006/diagram" xmlns:o="urn:schemas-microsoft-com:office:office" xmlns:v="urn:schemas-microsoft-com:vml" xmlns:pvml="urn:schemas-microsoft-com:office:powerpoint" xmlns:com="http://schemas.openxmlformats.org/drawingml/2006/compatibility" xmlns:p14="http://schemas.microsoft.com/office/powerpoint/2010/main" xmlns:p15="http://schemas.microsoft.com/office/powerpoint/2012/main" xmlns:ahyp="http://schemas.microsoft.com/office/drawing/2018/hyperlinkcolor">
-  <p:cSld>
-    <p:spTree>
-      <p:nvGrpSpPr>
-        <p:cNvPr id="25" name="Shape 25"/>
-        <p:cNvGrpSpPr/>
-        <p:nvPr/>
-      </p:nvGrpSpPr>
-      <p:grpSpPr>
-        <a:xfrm>
-          <a:off x="0" y="0"/>
-          <a:ext cx="0" cy="0"/>
-          <a:chOff x="0" y="0"/>
-          <a:chExt cx="0" cy="0"/>
-        </a:xfrm>
-      </p:grpSpPr>
-      <p:sp>
-        <p:nvSpPr>
-          <p:cNvPr id="26" name="Google Shape;26;p1"/>
-          <p:cNvSpPr/>
-          <p:nvPr/>
-        </p:nvSpPr>
-        <p:spPr>
-          <a:xfrm>
-            <a:off x="0" y="0"/>
-            <a:ext cx="9906000" cy="836712"/>
-          </a:xfrm>
-          <a:prstGeom prst="rect">
-            <a:avLst/>
-          </a:prstGeom>
-          <a:solidFill>
-            <a:schemeClr val="lt1"/>
-          </a:solidFill>
-          <a:ln>
-            <a:noFill/>
-          </a:ln>
-        </p:spPr>
-        <p:txBody>
-          <a:bodyPr anchorCtr="0" anchor="ctr" bIns="45700" lIns="91425" spcFirstLastPara="1" rIns="91425" wrap="square" tIns="45700">
-            <a:noAutofit/>
-          </a:bodyPr>
-          <a:lstStyle/>
-          <a:p>
-            <a:pPr indent="0" lvl="0" marL="0" marR="0" rtl="0" algn="ctr">
-              <a:spcBef>
-                <a:spcPts val="0"/>
-              </a:spcBef>
-              <a:spcAft>
-                <a:spcPts val="0"/>
-              </a:spcAft>
-              <a:buNone/>
-            </a:pPr>
-            <a:r>
-              <a:rPr>
-                <a:latin typeface="メイリオ"/>
-              </a:rPr>
-              <a:t/>
-            </a:r>
-            <a:endParaRPr b="0" i="0" sz="1800" u="none" cap="none" strike="noStrike">
-              <a:solidFill>
-                <a:schemeClr val="lt1"/>
-              </a:solidFill>
-              <a:latin typeface="Calibri"/>
-              <a:ea typeface="Calibri"/>
-              <a:cs typeface="Calibri"/>
-              <a:sym typeface="Calibri"/>
-            </a:endParaRPr>
-          </a:p>
-        </p:txBody>
-      </p:sp>
-      <p:pic>
-        <p:nvPicPr>
-          <p:cNvPr id="27" name="Google Shape;27;p1"/>
-          <p:cNvPicPr preferRelativeResize="0"/>
-          <p:nvPr/>
-        </p:nvPicPr>
-        <p:blipFill rotWithShape="1">
-          <a:blip r:embed="rId3">
-            <a:alphaModFix/>
-          </a:blip>
-          <a:srcRect b="0" l="-1647" r="-11171" t="0"/>
-          <a:stretch/>
-        </p:blipFill>
-        <p:spPr>
-          <a:xfrm>
-            <a:off x="8619408" y="188641"/>
-            <a:ext cx="1192729" cy="243605"/>
-          </a:xfrm>
-          <a:prstGeom prst="rect">
-            <a:avLst/>
-          </a:prstGeom>
-          <a:noFill/>
-          <a:ln>
-            <a:noFill/>
-          </a:ln>
-        </p:spPr>
-      </p:pic>
-      <p:sp>
-        <p:nvSpPr>
-          <p:cNvPr id="28" name="Google Shape;28;p1"/>
-          <p:cNvSpPr/>
-          <p:nvPr/>
-        </p:nvSpPr>
-        <p:spPr>
-          <a:xfrm>
-            <a:off x="1026684" y="3645024"/>
-            <a:ext cx="7873109" cy="45719"/>
-          </a:xfrm>
-          <a:prstGeom prst="rect">
-            <a:avLst/>
-          </a:prstGeom>
-          <a:solidFill>
-            <a:srgbClr val="15133D"/>
-          </a:solidFill>
-          <a:ln>
-            <a:noFill/>
-          </a:ln>
-        </p:spPr>
-        <p:txBody>
-          <a:bodyPr anchorCtr="0" anchor="ctr" bIns="45700" lIns="91425" spcFirstLastPara="1" rIns="91425" wrap="square" tIns="45700">
-            <a:noAutofit/>
-          </a:bodyPr>
-          <a:lstStyle/>
-          <a:p>
-            <a:pPr indent="0" lvl="0" marL="0" marR="0" rtl="0" algn="ctr">
-              <a:spcBef>
-                <a:spcPts val="0"/>
-              </a:spcBef>
-              <a:spcAft>
-                <a:spcPts val="0"/>
-              </a:spcAft>
-              <a:buNone/>
-            </a:pPr>
-            <a:r>
-              <a:rPr>
-                <a:latin typeface="メイリオ"/>
-              </a:rPr>
-              <a:t/>
-            </a:r>
-            <a:endParaRPr b="1" i="0" sz="1800" u="none" cap="none" strike="noStrike">
-              <a:solidFill>
-                <a:schemeClr val="lt1"/>
-              </a:solidFill>
-              <a:latin typeface="Arial"/>
-              <a:ea typeface="Arial"/>
-              <a:cs typeface="Arial"/>
-              <a:sym typeface="Arial"/>
-            </a:endParaRPr>
-          </a:p>
-        </p:txBody>
-      </p:sp>
-      <p:sp>
-        <p:nvSpPr>
-          <p:cNvPr id="29" name="Google Shape;29;p1"/>
-          <p:cNvSpPr/>
-          <p:nvPr/>
-        </p:nvSpPr>
-        <p:spPr>
-          <a:xfrm>
-            <a:off x="781200" y="3044550"/>
-            <a:ext cx="8343600" cy="646200"/>
-          </a:xfrm>
-          <a:prstGeom prst="rect">
-            <a:avLst/>
-          </a:prstGeom>
-          <a:noFill/>
-          <a:ln>
-            <a:noFill/>
-          </a:ln>
-        </p:spPr>
-        <p:txBody>
-          <a:bodyPr anchorCtr="0" anchor="t" bIns="45700" lIns="91425" spcFirstLastPara="1" rIns="91425" wrap="square" tIns="45700">
-            <a:spAutoFit/>
-          </a:bodyPr>
-          <a:lstStyle/>
-          <a:p>
-            <a:pPr indent="0" lvl="0" marL="0" marR="0" rtl="0" algn="ctr">
-              <a:spcBef>
-                <a:spcPts val="0"/>
-              </a:spcBef>
-              <a:spcAft>
-                <a:spcPts val="0"/>
-              </a:spcAft>
-              <a:buNone/>
-            </a:pPr>
-            <a:r>
-              <a:rPr b="1" i="0" lang="ja-JP" sz="3600" u="none" cap="none" strike="noStrike">
-                <a:solidFill>
-                  <a:srgbClr val="0F243E"/>
-                </a:solidFill>
-                <a:latin typeface="メイリオ"/>
-                <a:ea typeface="Arial"/>
-                <a:cs typeface="Arial"/>
-                <a:sym typeface="Arial"/>
-              </a:rPr>
-              <a:t>LINEオープンキャンペーン　26年10-12月　ご案内</a:t>
-            </a:r>
-            <a:endParaRPr b="1" i="0" sz="2000" u="none" cap="none" strike="noStrike">
-              <a:solidFill>
-                <a:srgbClr val="0F243E"/>
-              </a:solidFill>
-              <a:latin typeface="Arial"/>
-              <a:ea typeface="Arial"/>
-              <a:cs typeface="Arial"/>
-              <a:sym typeface="Arial"/>
-            </a:endParaRPr>
-          </a:p>
-        </p:txBody>
-      </p:sp>
-    </p:spTree>
-  </p:cSld>
-  <p:clrMapOvr>
-    <a:masterClrMapping/>
-  </p:clrMapOvr>
-</p:sld>
-</file>
-
-<file path=ppt/slides/slide2.xml><?xml version="1.0" encoding="utf-8"?>
-<p:sld xmlns:a="http://schemas.openxmlformats.org/drawingml/2006/main" xmlns:r="http://schemas.openxmlformats.org/officeDocument/2006/relationships" xmlns:mc="http://schemas.openxmlformats.org/markup-compatibility/2006" xmlns:mv="urn:schemas-microsoft-com:mac:vml" xmlns:p="http://schemas.openxmlformats.org/presentationml/2006/main" xmlns:c="http://schemas.openxmlformats.org/drawingml/2006/chart" xmlns:dgm="http://schemas.openxmlformats.org/drawingml/2006/diagram" xmlns:o="urn:schemas-microsoft-com:office:office" xmlns:v="urn:schemas-microsoft-com:vml" xmlns:pvml="urn:schemas-microsoft-com:office:powerpoint" xmlns:com="http://schemas.openxmlformats.org/drawingml/2006/compatibility" xmlns:p14="http://schemas.microsoft.com/office/powerpoint/2010/main" xmlns:p15="http://schemas.microsoft.com/office/powerpoint/2012/main" xmlns:ahyp="http://schemas.microsoft.com/office/drawing/2018/hyperlinkcolor">
-  <p:cSld>
-    <p:spTree>
-      <p:nvGrpSpPr>
-        <p:cNvPr id="33" name="Shape 33"/>
-        <p:cNvGrpSpPr/>
-        <p:nvPr/>
-      </p:nvGrpSpPr>
-      <p:grpSpPr>
-        <a:xfrm>
-          <a:off x="0" y="0"/>
-          <a:ext cx="0" cy="0"/>
-          <a:chOff x="0" y="0"/>
-          <a:chExt cx="0" cy="0"/>
-        </a:xfrm>
-      </p:grpSpPr>
-      <p:sp>
-        <p:nvSpPr>
-          <p:cNvPr id="34" name="Google Shape;34;p2"/>
-          <p:cNvSpPr txBox="1"/>
-          <p:nvPr/>
-        </p:nvSpPr>
-        <p:spPr>
-          <a:xfrm>
-            <a:off x="318183" y="1483585"/>
-            <a:ext cx="9298331" cy="4279033"/>
-          </a:xfrm>
-          <a:prstGeom prst="rect">
-            <a:avLst/>
-          </a:prstGeom>
-          <a:noFill/>
-          <a:ln>
-            <a:noFill/>
-          </a:ln>
-        </p:spPr>
-        <p:txBody>
-          <a:bodyPr anchorCtr="0" anchor="t" bIns="90000" lIns="91425" spcFirstLastPara="1" rIns="91425" wrap="square" tIns="90000">
-            <a:spAutoFit/>
-          </a:bodyPr>
-          <a:lstStyle/>
-          <a:p>
-            <a:pPr indent="0" lvl="0" marL="0" marR="0" rtl="0" algn="l">
-              <a:lnSpc>
-                <a:spcPct val="200000"/>
-              </a:lnSpc>
-              <a:spcBef>
-                <a:spcPts val="0"/>
-              </a:spcBef>
-              <a:spcAft>
-                <a:spcPts val="0"/>
-              </a:spcAft>
-              <a:buNone/>
-            </a:pPr>
-            <a:r>
-              <a:rPr b="1" i="0" lang="ja-JP" sz="1500" u="none" cap="none" strike="noStrike">
-                <a:solidFill>
-                  <a:schemeClr val="dk1"/>
-                </a:solidFill>
-                <a:latin typeface="メイリオ"/>
-                <a:ea typeface="Meiryo"/>
-                <a:cs typeface="Meiryo"/>
-                <a:sym typeface="Meiryo"/>
-              </a:rPr>
-              <a:t>P.3　　【LINEオープンキャンペーン】特典内容</a:t>
-            </a:r>
-            <a:endParaRPr/>
-          </a:p>
-          <a:p>
-            <a:pPr indent="0" lvl="0" marL="0" marR="0" rtl="0" algn="l">
-              <a:lnSpc>
-                <a:spcPct val="200000"/>
-              </a:lnSpc>
-              <a:spcBef>
-                <a:spcPts val="0"/>
-              </a:spcBef>
-              <a:spcAft>
-                <a:spcPts val="0"/>
-              </a:spcAft>
-              <a:buNone/>
-            </a:pPr>
-            <a:r>
-              <a:rPr b="1" i="0" lang="ja-JP" sz="1500" u="none" cap="none" strike="noStrike">
-                <a:solidFill>
-                  <a:schemeClr val="dk1"/>
-                </a:solidFill>
-                <a:latin typeface="メイリオ"/>
-                <a:ea typeface="Meiryo"/>
-                <a:cs typeface="Meiryo"/>
-                <a:sym typeface="Meiryo"/>
-              </a:rPr>
-              <a:t>P.4　　【LINEオープンキャンペーン】実施スケジュール</a:t>
-            </a:r>
-            <a:endParaRPr/>
-          </a:p>
-          <a:p>
-            <a:pPr indent="0" lvl="0" marL="0" marR="0" rtl="0" algn="l">
-              <a:lnSpc>
-                <a:spcPct val="200000"/>
-              </a:lnSpc>
-              <a:spcBef>
-                <a:spcPts val="0"/>
-              </a:spcBef>
-              <a:spcAft>
-                <a:spcPts val="0"/>
-              </a:spcAft>
-              <a:buNone/>
-            </a:pPr>
-            <a:r>
-              <a:rPr b="1" i="0" lang="ja-JP" sz="1500" u="none" cap="none" strike="noStrike">
-                <a:solidFill>
-                  <a:schemeClr val="dk1"/>
-                </a:solidFill>
-                <a:latin typeface="メイリオ"/>
-                <a:ea typeface="Meiryo"/>
-                <a:cs typeface="Meiryo"/>
-                <a:sym typeface="Meiryo"/>
-              </a:rPr>
-              <a:t>P.5　　【LINEオープンキャンペーン】注意点・ご利用条件</a:t>
-            </a:r>
-            <a:endParaRPr b="1" i="0" sz="1500" u="none" cap="none" strike="noStrike">
-              <a:solidFill>
-                <a:schemeClr val="dk1"/>
-              </a:solidFill>
-              <a:latin typeface="Meiryo"/>
-              <a:ea typeface="Meiryo"/>
-              <a:cs typeface="Meiryo"/>
-              <a:sym typeface="Meiryo"/>
-            </a:endParaRPr>
-          </a:p>
-        </p:txBody>
-      </p:sp>
-      <p:sp>
-        <p:nvSpPr>
-          <p:cNvPr id="35" name="Google Shape;35;p2"/>
-          <p:cNvSpPr txBox="1"/>
-          <p:nvPr/>
-        </p:nvSpPr>
-        <p:spPr>
-          <a:xfrm>
-            <a:off x="292801" y="62027"/>
-            <a:ext cx="7512385" cy="365091"/>
-          </a:xfrm>
-          <a:prstGeom prst="rect">
-            <a:avLst/>
-          </a:prstGeom>
-          <a:noFill/>
-          <a:ln>
-            <a:noFill/>
-          </a:ln>
-        </p:spPr>
-        <p:txBody>
-          <a:bodyPr anchorCtr="0" anchor="t" bIns="45700" lIns="91425" spcFirstLastPara="1" rIns="91425" wrap="square" tIns="72000">
-            <a:spAutoFit/>
-          </a:bodyPr>
-          <a:lstStyle/>
-          <a:p>
-            <a:pPr indent="0" lvl="0" marL="0" marR="0" rtl="0" algn="l">
-              <a:lnSpc>
-                <a:spcPct val="100000"/>
-              </a:lnSpc>
-              <a:spcBef>
-                <a:spcPts val="0"/>
-              </a:spcBef>
-              <a:spcAft>
-                <a:spcPts val="0"/>
-              </a:spcAft>
-              <a:buClr>
-                <a:srgbClr val="000000"/>
-              </a:buClr>
-              <a:buSzPts val="1600"/>
-              <a:buFont typeface="Arial"/>
-              <a:buNone/>
-            </a:pPr>
-            <a:r>
-              <a:rPr b="0" i="0" lang="ja-JP" sz="1600" u="none" cap="none" strike="noStrike">
-                <a:solidFill>
-                  <a:srgbClr val="000000"/>
-                </a:solidFill>
-                <a:latin typeface="メイリオ"/>
-                <a:ea typeface="Meiryo"/>
-                <a:cs typeface="Meiryo"/>
-                <a:sym typeface="Meiryo"/>
-              </a:rPr>
-              <a:t>    目次</a:t>
-            </a:r>
-            <a:endParaRPr b="0" i="0" sz="1600" u="none" cap="none" strike="noStrike">
-              <a:solidFill>
-                <a:srgbClr val="000000"/>
-              </a:solidFill>
-              <a:latin typeface="Meiryo"/>
-              <a:ea typeface="Meiryo"/>
-              <a:cs typeface="Meiryo"/>
-              <a:sym typeface="Meiryo"/>
-            </a:endParaRPr>
-          </a:p>
-        </p:txBody>
-      </p:sp>
-    </p:spTree>
-  </p:cSld>
-  <p:clrMapOvr>
-    <a:masterClrMapping/>
-  </p:clrMapOvr>
-</p:sld>
-</file>
-
 <file path=ppt/slides/slide3.xml><?xml version="1.0" encoding="utf-8"?>
 <p:sld xmlns:a="http://schemas.openxmlformats.org/drawingml/2006/main" xmlns:r="http://schemas.openxmlformats.org/officeDocument/2006/relationships" xmlns:mc="http://schemas.openxmlformats.org/markup-compatibility/2006" xmlns:mv="urn:schemas-microsoft-com:mac:vml" xmlns:p="http://schemas.openxmlformats.org/presentationml/2006/main" xmlns:c="http://schemas.openxmlformats.org/drawingml/2006/chart" xmlns:dgm="http://schemas.openxmlformats.org/drawingml/2006/diagram" xmlns:o="urn:schemas-microsoft-com:office:office" xmlns:v="urn:schemas-microsoft-com:vml" xmlns:pvml="urn:schemas-microsoft-com:office:powerpoint" xmlns:com="http://schemas.openxmlformats.org/drawingml/2006/compatibility" xmlns:p14="http://schemas.microsoft.com/office/powerpoint/2010/main" xmlns:p15="http://schemas.microsoft.com/office/powerpoint/2012/main" xmlns:ahyp="http://schemas.microsoft.com/office/drawing/2018/hyperlinkcolor">
   <p:cSld>

--- a/LINEオープンキャンペーン_26年10-12月_ご案内.pptx
+++ b/LINEオープンキャンペーン_26年10-12月_ご案内.pptx
@@ -4049,7 +4049,7 @@
         <p:spPr>
           <a:xfrm>
             <a:off x="544108" y="3068960"/>
-            <a:ext cx="4434840" cy="274320"/>
+            <a:ext cx="3547872" cy="274320"/>
           </a:xfrm>
           <a:prstGeom prst="rect">
             <a:avLst/>
@@ -4102,7 +4102,7 @@
         <p:spPr>
           <a:xfrm>
             <a:off x="544108" y="3343280"/>
-            <a:ext cx="4434840" cy="640080"/>
+            <a:ext cx="3547872" cy="640080"/>
           </a:xfrm>
           <a:prstGeom prst="rect">
             <a:avLst/>
@@ -4141,7 +4141,7 @@
               </a:lnSpc>
             </a:pPr>
             <a:r>
-              <a:rPr sz="1800" b="1">
+              <a:rPr sz="1300" b="1">
                 <a:solidFill>
                   <a:srgbClr val="15133D"/>
                 </a:solidFill>
@@ -4160,7 +4160,7 @@
         </p:nvSpPr>
         <p:spPr>
           <a:xfrm>
-            <a:off x="4978948" y="3068960"/>
+            <a:off x="4091980" y="3068960"/>
             <a:ext cx="457200" cy="914400"/>
           </a:xfrm>
           <a:prstGeom prst="rect">
@@ -4195,8 +4195,8 @@
         </p:nvSpPr>
         <p:spPr>
           <a:xfrm>
-            <a:off x="5436148" y="3068960"/>
-            <a:ext cx="4434840" cy="274320"/>
+            <a:off x="4549180" y="3068960"/>
+            <a:ext cx="5321808" cy="274320"/>
           </a:xfrm>
           <a:prstGeom prst="rect">
             <a:avLst/>
@@ -4248,8 +4248,8 @@
         </p:nvSpPr>
         <p:spPr>
           <a:xfrm>
-            <a:off x="5436148" y="3343280"/>
-            <a:ext cx="4434840" cy="640080"/>
+            <a:off x="4549180" y="3343280"/>
+            <a:ext cx="5321808" cy="640080"/>
           </a:xfrm>
           <a:prstGeom prst="rect">
             <a:avLst/>
@@ -4288,7 +4288,7 @@
               </a:lnSpc>
             </a:pPr>
             <a:r>
-              <a:rPr sz="1600" b="1">
+              <a:rPr sz="2200" b="1">
                 <a:solidFill>
                   <a:srgbClr val="15133D"/>
                 </a:solidFill>

--- a/LINEオープンキャンペーン_26年10-12月_ご案内.pptx
+++ b/LINEオープンキャンペーン_26年10-12月_ご案内.pptx
@@ -2977,7 +2977,7 @@
                 <a:cs typeface="Meiryo"/>
                 <a:sym typeface="Meiryo"/>
               </a:rPr>
-              <a:t>出典：https://workers-hub.box.com/s/odilqpe44tp398zlfko148yggcgj68ny</a:t>
+              <a:t>出典：https://www.lycbiz.com/jp/service/line-sales-promotion/</a:t>
             </a:r>
             <a:endParaRPr sz="800">
               <a:solidFill>
@@ -4802,7 +4802,7 @@
                 <a:cs typeface="Meiryo"/>
                 <a:sym typeface="Meiryo"/>
               </a:rPr>
-              <a:t>出典：https://workers-hub.box.com/s/odilqpe44tp398zlfko148yggcgj68ny</a:t>
+              <a:t>出典：https://www.lycbiz.com/jp/service/line-sales-promotion/</a:t>
             </a:r>
             <a:endParaRPr sz="800">
               <a:solidFill>
@@ -6826,7 +6826,7 @@
                 <a:cs typeface="Meiryo"/>
                 <a:sym typeface="Meiryo"/>
               </a:rPr>
-              <a:t>出典：https://workers-hub.box.com/s/odilqpe44tp398zlfko148yggcgj68ny</a:t>
+              <a:t>出典：https://www.lycbiz.com/jp/service/line-sales-promotion/</a:t>
             </a:r>
             <a:endParaRPr sz="800">
               <a:solidFill>
